--- a/ppt/smart-city-monitoring.pptx
+++ b/ppt/smart-city-monitoring.pptx
@@ -3101,8 +3101,8 @@
         </p:nvSpPr>
         <p:spPr>
           <a:xfrm>
-            <a:off x="0" y="0"/>
-            <a:ext cx="12191695" cy="2651760"/>
+            <a:off x="-91440" y="-91440"/>
+            <a:ext cx="12435840" cy="7040880"/>
           </a:xfrm>
           <a:prstGeom prst="rect">
             <a:avLst/>
@@ -3145,8 +3145,8 @@
         </p:nvSpPr>
         <p:spPr>
           <a:xfrm>
-            <a:off x="731520" y="731520"/>
-            <a:ext cx="10698480" cy="1463040"/>
+            <a:off x="5852160" y="91440"/>
+            <a:ext cx="6583680" cy="4572000"/>
           </a:xfrm>
           <a:prstGeom prst="rect">
             <a:avLst/>
@@ -3154,34 +3154,78 @@
           <a:noFill/>
         </p:spPr>
         <p:txBody>
-          <a:bodyPr wrap="square" anchor="ctr">
+          <a:bodyPr wrap="square" anchor="t">
             <a:spAutoFit/>
           </a:bodyPr>
           <a:lstStyle/>
           <a:p>
-            <a:pPr algn="l"/>
-            <a:r>
-              <a:rPr sz="3000" b="1">
-                <a:solidFill>
-                  <a:srgbClr val="FFFFFF"/>
+            <a:pPr algn="r"/>
+            <a:r>
+              <a:rPr sz="34000" b="1" i="0">
+                <a:solidFill>
+                  <a:srgbClr val="56639A"/>
                 </a:solidFill>
                 <a:latin typeface="Century Gothic"/>
               </a:rPr>
-              <a:t>Smart City Environmental Monitoring</a:t>
-            </a:r>
-          </a:p>
-        </p:txBody>
-      </p:sp>
-      <p:sp>
-        <p:nvSpPr>
-          <p:cNvPr id="4" name="TextBox 3"/>
+              <a:t>SC</a:t>
+            </a:r>
+          </a:p>
+        </p:txBody>
+      </p:sp>
+      <p:sp>
+        <p:nvSpPr>
+          <p:cNvPr id="4" name="Rectangle 3"/>
+          <p:cNvSpPr/>
+          <p:nvPr/>
+        </p:nvSpPr>
+        <p:spPr>
+          <a:xfrm>
+            <a:off x="822960" y="2148840"/>
+            <a:ext cx="1554480" cy="82296"/>
+          </a:xfrm>
+          <a:prstGeom prst="rect">
+            <a:avLst/>
+          </a:prstGeom>
+          <a:solidFill>
+            <a:srgbClr val="FFFFFF"/>
+          </a:solidFill>
+          <a:ln>
+            <a:noFill/>
+          </a:ln>
+          <a:effectLst/>
+        </p:spPr>
+        <p:style>
+          <a:lnRef idx="1">
+            <a:schemeClr val="accent1"/>
+          </a:lnRef>
+          <a:fillRef idx="3">
+            <a:schemeClr val="accent1"/>
+          </a:fillRef>
+          <a:effectRef idx="2">
+            <a:schemeClr val="accent1"/>
+          </a:effectRef>
+          <a:fontRef idx="minor">
+            <a:schemeClr val="lt1"/>
+          </a:fontRef>
+        </p:style>
+        <p:txBody>
+          <a:bodyPr rtlCol="0" anchor="ctr"/>
+          <a:lstStyle/>
+          <a:p>
+            <a:pPr algn="ctr"/>
+          </a:p>
+        </p:txBody>
+      </p:sp>
+      <p:sp>
+        <p:nvSpPr>
+          <p:cNvPr id="5" name="TextBox 4"/>
           <p:cNvSpPr txBox="1"/>
           <p:nvPr/>
         </p:nvSpPr>
         <p:spPr>
           <a:xfrm>
-            <a:off x="731520" y="3108960"/>
-            <a:ext cx="10698480" cy="2743200"/>
+            <a:off x="777240" y="2377440"/>
+            <a:ext cx="7498079" cy="2103120"/>
           </a:xfrm>
           <a:prstGeom prst="rect">
             <a:avLst/>
@@ -3196,33 +3240,79 @@
           <a:p>
             <a:pPr algn="l"/>
             <a:r>
-              <a:rPr sz="1800" b="0">
-                <a:solidFill>
-                  <a:srgbClr val="5C655F"/>
+              <a:rPr sz="3400" b="1" i="0">
+                <a:solidFill>
+                  <a:srgbClr val="FFFFFF"/>
+                </a:solidFill>
+                <a:latin typeface="Century Gothic"/>
+              </a:rPr>
+              <a:t>Smart City Environmental Monitoring</a:t>
+            </a:r>
+          </a:p>
+        </p:txBody>
+      </p:sp>
+      <p:sp>
+        <p:nvSpPr>
+          <p:cNvPr id="6" name="TextBox 5"/>
+          <p:cNvSpPr txBox="1"/>
+          <p:nvPr/>
+        </p:nvSpPr>
+        <p:spPr>
+          <a:xfrm>
+            <a:off x="822960" y="4160520"/>
+            <a:ext cx="7315200" cy="640080"/>
+          </a:xfrm>
+          <a:prstGeom prst="rect">
+            <a:avLst/>
+          </a:prstGeom>
+          <a:noFill/>
+        </p:spPr>
+        <p:txBody>
+          <a:bodyPr wrap="square" anchor="t">
+            <a:spAutoFit/>
+          </a:bodyPr>
+          <a:lstStyle/>
+          <a:p>
+            <a:pPr algn="l"/>
+            <a:r>
+              <a:rPr sz="1700" b="0" i="1">
+                <a:solidFill>
+                  <a:srgbClr val="D3D7E5"/>
                 </a:solidFill>
                 <a:latin typeface="Verdana"/>
               </a:rPr>
               <a:t>Ten street sensors, one edge relay, one serverless cloud pipeline</a:t>
             </a:r>
           </a:p>
+        </p:txBody>
+      </p:sp>
+      <p:sp>
+        <p:nvSpPr>
+          <p:cNvPr id="7" name="TextBox 6"/>
+          <p:cNvSpPr txBox="1"/>
+          <p:nvPr/>
+        </p:nvSpPr>
+        <p:spPr>
+          <a:xfrm>
+            <a:off x="822960" y="4983480"/>
+            <a:ext cx="7863840" cy="1371600"/>
+          </a:xfrm>
+          <a:prstGeom prst="rect">
+            <a:avLst/>
+          </a:prstGeom>
+          <a:noFill/>
+        </p:spPr>
+        <p:txBody>
+          <a:bodyPr wrap="square" anchor="t">
+            <a:spAutoFit/>
+          </a:bodyPr>
+          <a:lstStyle/>
           <a:p>
             <a:pPr algn="l"/>
             <a:r>
-              <a:rPr sz="1600" b="1">
-                <a:solidFill>
-                  <a:srgbClr val="232A26"/>
-                </a:solidFill>
-                <a:latin typeface="Verdana"/>
-              </a:rPr>
-              <a:t/>
-            </a:r>
-          </a:p>
-          <a:p>
-            <a:pPr algn="l"/>
-            <a:r>
-              <a:rPr sz="1300" b="0">
-                <a:solidFill>
-                  <a:srgbClr val="5C655F"/>
+              <a:rPr sz="1250" b="0" i="0">
+                <a:solidFill>
+                  <a:srgbClr val="C0C5D9"/>
                 </a:solidFill>
                 <a:latin typeface="Verdana"/>
               </a:rPr>
@@ -3232,9 +3322,9 @@
           <a:p>
             <a:pPr algn="l"/>
             <a:r>
-              <a:rPr sz="1300" b="0">
-                <a:solidFill>
-                  <a:srgbClr val="5C655F"/>
+              <a:rPr sz="1250" b="0" i="0">
+                <a:solidFill>
+                  <a:srgbClr val="C0C5D9"/>
                 </a:solidFill>
                 <a:latin typeface="Verdana"/>
               </a:rPr>

--- a/ppt/smart-city-monitoring.pptx
+++ b/ppt/smart-city-monitoring.pptx
@@ -3139,48 +3139,13 @@
       </p:sp>
       <p:sp>
         <p:nvSpPr>
-          <p:cNvPr id="3" name="TextBox 2"/>
-          <p:cNvSpPr txBox="1"/>
+          <p:cNvPr id="3" name="Rectangle 2"/>
+          <p:cNvSpPr/>
           <p:nvPr/>
         </p:nvSpPr>
         <p:spPr>
           <a:xfrm>
-            <a:off x="5852160" y="91440"/>
-            <a:ext cx="6583680" cy="4572000"/>
-          </a:xfrm>
-          <a:prstGeom prst="rect">
-            <a:avLst/>
-          </a:prstGeom>
-          <a:noFill/>
-        </p:spPr>
-        <p:txBody>
-          <a:bodyPr wrap="square" anchor="t">
-            <a:spAutoFit/>
-          </a:bodyPr>
-          <a:lstStyle/>
-          <a:p>
-            <a:pPr algn="r"/>
-            <a:r>
-              <a:rPr sz="34000" b="1" i="0">
-                <a:solidFill>
-                  <a:srgbClr val="56639A"/>
-                </a:solidFill>
-                <a:latin typeface="Century Gothic"/>
-              </a:rPr>
-              <a:t>SC</a:t>
-            </a:r>
-          </a:p>
-        </p:txBody>
-      </p:sp>
-      <p:sp>
-        <p:nvSpPr>
-          <p:cNvPr id="4" name="Rectangle 3"/>
-          <p:cNvSpPr/>
-          <p:nvPr/>
-        </p:nvSpPr>
-        <p:spPr>
-          <a:xfrm>
-            <a:off x="822960" y="2148840"/>
+            <a:off x="9811512" y="1965960"/>
             <a:ext cx="1554480" cy="82296"/>
           </a:xfrm>
           <a:prstGeom prst="rect">
@@ -3218,14 +3183,14 @@
       </p:sp>
       <p:sp>
         <p:nvSpPr>
-          <p:cNvPr id="5" name="TextBox 4"/>
+          <p:cNvPr id="4" name="TextBox 3"/>
           <p:cNvSpPr txBox="1"/>
           <p:nvPr/>
         </p:nvSpPr>
         <p:spPr>
           <a:xfrm>
-            <a:off x="777240" y="2377440"/>
-            <a:ext cx="7498079" cy="2103120"/>
+            <a:off x="3200400" y="2194560"/>
+            <a:ext cx="8165592" cy="2103120"/>
           </a:xfrm>
           <a:prstGeom prst="rect">
             <a:avLst/>
@@ -3238,7 +3203,7 @@
           </a:bodyPr>
           <a:lstStyle/>
           <a:p>
-            <a:pPr algn="l"/>
+            <a:pPr algn="r"/>
             <a:r>
               <a:rPr sz="3400" b="1" i="0">
                 <a:solidFill>
@@ -3253,14 +3218,14 @@
       </p:sp>
       <p:sp>
         <p:nvSpPr>
-          <p:cNvPr id="6" name="TextBox 5"/>
+          <p:cNvPr id="5" name="TextBox 4"/>
           <p:cNvSpPr txBox="1"/>
           <p:nvPr/>
         </p:nvSpPr>
         <p:spPr>
           <a:xfrm>
-            <a:off x="822960" y="4160520"/>
-            <a:ext cx="7315200" cy="640080"/>
+            <a:off x="4023360" y="4069080"/>
+            <a:ext cx="7342631" cy="640080"/>
           </a:xfrm>
           <a:prstGeom prst="rect">
             <a:avLst/>
@@ -3273,7 +3238,7 @@
           </a:bodyPr>
           <a:lstStyle/>
           <a:p>
-            <a:pPr algn="l"/>
+            <a:pPr algn="r"/>
             <a:r>
               <a:rPr sz="1700" b="0" i="1">
                 <a:solidFill>
@@ -3288,14 +3253,14 @@
       </p:sp>
       <p:sp>
         <p:nvSpPr>
-          <p:cNvPr id="7" name="TextBox 6"/>
+          <p:cNvPr id="6" name="TextBox 5"/>
           <p:cNvSpPr txBox="1"/>
           <p:nvPr/>
         </p:nvSpPr>
         <p:spPr>
           <a:xfrm>
-            <a:off x="822960" y="4983480"/>
-            <a:ext cx="7863840" cy="1371600"/>
+            <a:off x="3566160" y="4892040"/>
+            <a:ext cx="7799831" cy="1371600"/>
           </a:xfrm>
           <a:prstGeom prst="rect">
             <a:avLst/>
@@ -3308,7 +3273,7 @@
           </a:bodyPr>
           <a:lstStyle/>
           <a:p>
-            <a:pPr algn="l"/>
+            <a:pPr algn="r"/>
             <a:r>
               <a:rPr sz="1250" b="0" i="0">
                 <a:solidFill>
@@ -3320,7 +3285,7 @@
             </a:r>
           </a:p>
           <a:p>
-            <a:pPr algn="l"/>
+            <a:pPr algn="r"/>
             <a:r>
               <a:rPr sz="1250" b="0" i="0">
                 <a:solidFill>

--- a/ppt/smart-city-monitoring.pptx
+++ b/ppt/smart-city-monitoring.pptx
@@ -3108,7 +3108,7 @@
             <a:avLst/>
           </a:prstGeom>
           <a:solidFill>
-            <a:srgbClr val="3B4A8A"/>
+            <a:srgbClr val="C08A1F"/>
           </a:solidFill>
           <a:ln>
             <a:noFill/>
@@ -3242,7 +3242,7 @@
             <a:r>
               <a:rPr sz="1700" b="0" i="1">
                 <a:solidFill>
-                  <a:srgbClr val="D3D7E5"/>
+                  <a:srgbClr val="F1E5CD"/>
                 </a:solidFill>
                 <a:latin typeface="Verdana"/>
               </a:rPr>
@@ -3277,7 +3277,7 @@
             <a:r>
               <a:rPr sz="1250" b="0" i="0">
                 <a:solidFill>
-                  <a:srgbClr val="C0C5D9"/>
+                  <a:srgbClr val="EAD9B7"/>
                 </a:solidFill>
                 <a:latin typeface="Verdana"/>
               </a:rPr>
@@ -3289,7 +3289,7 @@
             <a:r>
               <a:rPr sz="1250" b="0" i="0">
                 <a:solidFill>
-                  <a:srgbClr val="C0C5D9"/>
+                  <a:srgbClr val="EAD9B7"/>
                 </a:solidFill>
                 <a:latin typeface="Verdana"/>
               </a:rPr>
@@ -3331,7 +3331,7 @@
             <a:avLst/>
           </a:prstGeom>
           <a:solidFill>
-            <a:srgbClr val="3B4A8A"/>
+            <a:srgbClr val="C08A1F"/>
           </a:solidFill>
           <a:ln>
             <a:noFill/>
@@ -3471,7 +3471,7 @@
             <a:r>
               <a:rPr sz="1700" b="1">
                 <a:solidFill>
-                  <a:srgbClr val="3B4A8A"/>
+                  <a:srgbClr val="C08A1F"/>
                 </a:solidFill>
                 <a:latin typeface="Verdana"/>
               </a:rPr>
@@ -3561,7 +3561,7 @@
             <a:avLst/>
           </a:prstGeom>
           <a:solidFill>
-            <a:srgbClr val="3B4A8A"/>
+            <a:srgbClr val="C08A1F"/>
           </a:solidFill>
           <a:ln>
             <a:noFill/>
@@ -3653,7 +3653,7 @@
             <a:r>
               <a:rPr sz="1500" b="1">
                 <a:solidFill>
-                  <a:srgbClr val="3B4A8A"/>
+                  <a:srgbClr val="C08A1F"/>
                 </a:solidFill>
                 <a:latin typeface="Verdana"/>
               </a:rPr>
@@ -3701,7 +3701,7 @@
             <a:r>
               <a:rPr sz="1500" b="1">
                 <a:solidFill>
-                  <a:srgbClr val="3B4A8A"/>
+                  <a:srgbClr val="C08A1F"/>
                 </a:solidFill>
                 <a:latin typeface="Verdana"/>
               </a:rPr>
@@ -3781,7 +3781,7 @@
             <a:r>
               <a:rPr sz="1500" b="1">
                 <a:solidFill>
-                  <a:srgbClr val="3B4A8A"/>
+                  <a:srgbClr val="C08A1F"/>
                 </a:solidFill>
                 <a:latin typeface="Verdana"/>
               </a:rPr>
@@ -3823,7 +3823,7 @@
             <a:avLst/>
           </a:prstGeom>
           <a:solidFill>
-            <a:srgbClr val="3B4A8A"/>
+            <a:srgbClr val="C08A1F"/>
           </a:solidFill>
           <a:ln>
             <a:noFill/>
@@ -3947,7 +3947,7 @@
             <a:r>
               <a:rPr sz="1500" b="1">
                 <a:solidFill>
-                  <a:srgbClr val="3B4A8A"/>
+                  <a:srgbClr val="C08A1F"/>
                 </a:solidFill>
                 <a:latin typeface="Verdana"/>
               </a:rPr>
@@ -4061,7 +4061,7 @@
             <a:avLst/>
           </a:prstGeom>
           <a:solidFill>
-            <a:srgbClr val="3B4A8A"/>
+            <a:srgbClr val="C08A1F"/>
           </a:solidFill>
           <a:ln>
             <a:noFill/>
@@ -4169,7 +4169,7 @@
             <a:r>
               <a:rPr sz="1500" b="1">
                 <a:solidFill>
-                  <a:srgbClr val="3B4A8A"/>
+                  <a:srgbClr val="C08A1F"/>
                 </a:solidFill>
                 <a:latin typeface="Verdana"/>
               </a:rPr>
@@ -4201,7 +4201,7 @@
             <a:r>
               <a:rPr sz="1500" b="1">
                 <a:solidFill>
-                  <a:srgbClr val="3B4A8A"/>
+                  <a:srgbClr val="C08A1F"/>
                 </a:solidFill>
                 <a:latin typeface="Verdana"/>
               </a:rPr>
@@ -4233,7 +4233,7 @@
             <a:r>
               <a:rPr sz="1500" b="1">
                 <a:solidFill>
-                  <a:srgbClr val="3B4A8A"/>
+                  <a:srgbClr val="C08A1F"/>
                 </a:solidFill>
                 <a:latin typeface="Verdana"/>
               </a:rPr>
@@ -4265,7 +4265,7 @@
             <a:r>
               <a:rPr sz="1500" b="1">
                 <a:solidFill>
-                  <a:srgbClr val="3B4A8A"/>
+                  <a:srgbClr val="C08A1F"/>
                 </a:solidFill>
                 <a:latin typeface="Verdana"/>
               </a:rPr>
@@ -4307,7 +4307,7 @@
             <a:avLst/>
           </a:prstGeom>
           <a:solidFill>
-            <a:srgbClr val="3B4A8A"/>
+            <a:srgbClr val="C08A1F"/>
           </a:solidFill>
           <a:ln>
             <a:noFill/>
@@ -4447,7 +4447,7 @@
             <a:r>
               <a:rPr sz="1700" b="1">
                 <a:solidFill>
-                  <a:srgbClr val="3B4A8A"/>
+                  <a:srgbClr val="C08A1F"/>
                 </a:solidFill>
                 <a:latin typeface="Verdana"/>
               </a:rPr>

--- a/ppt/smart-city-monitoring.pptx
+++ b/ppt/smart-city-monitoring.pptx
@@ -3318,14 +3318,182 @@
       <p:grpSpPr/>
       <p:sp>
         <p:nvSpPr>
+          <p:cNvPr id="2" name="Title 1"/>
+          <p:cNvSpPr>
+            <a:spLocks noGrp="1"/>
+          </p:cNvSpPr>
+          <p:nvPr>
+            <p:ph type="title"/>
+          </p:nvPr>
+        </p:nvSpPr>
+        <p:spPr>
+          <a:xfrm>
+            <a:off x="1691640" y="457200"/>
+            <a:ext cx="9875520" cy="868680"/>
+          </a:xfrm>
+        </p:spPr>
+        <p:txBody>
+          <a:bodyPr wrap="square" anchor="ctr"/>
+          <a:lstStyle/>
+          <a:p>
+            <a:pPr algn="l"/>
+            <a:r>
+              <a:rPr b="1" sz="2700">
+                <a:solidFill>
+                  <a:srgbClr val="C08A1F"/>
+                </a:solidFill>
+                <a:latin typeface="Century Gothic"/>
+              </a:rPr>
+              <a:t>Why occasional checking fails</a:t>
+            </a:r>
+          </a:p>
+        </p:txBody>
+      </p:sp>
+      <p:sp>
+        <p:nvSpPr>
+          <p:cNvPr id="3" name="Content Placeholder 2"/>
+          <p:cNvSpPr>
+            <a:spLocks noGrp="1"/>
+          </p:cNvSpPr>
+          <p:nvPr>
+            <p:ph idx="1"/>
+          </p:nvPr>
+        </p:nvSpPr>
+        <p:spPr>
+          <a:xfrm>
+            <a:off x="658368" y="1600200"/>
+            <a:ext cx="10972800" cy="4663440"/>
+          </a:xfrm>
+        </p:spPr>
+        <p:txBody>
+          <a:bodyPr wrap="square">
+            <a:normAutofit/>
+          </a:bodyPr>
+          <a:lstStyle/>
+          <a:p>
+            <a:pPr>
+              <a:spcAft>
+                <a:spcPts val="900"/>
+              </a:spcAft>
+            </a:pPr>
+            <a:r>
+              <a:rPr sz="1700" b="0">
+                <a:solidFill>
+                  <a:srgbClr val="232A26"/>
+                </a:solidFill>
+                <a:latin typeface="Verdana"/>
+              </a:rPr>
+              <a:t>Congestion, pollution spikes and full car parks build and fade within minutes, between any two manual checks.</a:t>
+            </a:r>
+          </a:p>
+          <a:p>
+            <a:pPr>
+              <a:spcAft>
+                <a:spcPts val="900"/>
+              </a:spcAft>
+            </a:pPr>
+            <a:r>
+              <a:rPr sz="1700" b="0">
+                <a:solidFill>
+                  <a:srgbClr val="232A26"/>
+                </a:solidFill>
+                <a:latin typeface="Verdana"/>
+              </a:rPr>
+              <a:t>A patrol or a monthly meter read captures one moment; the breach that matters happens after the clipboard leaves.</a:t>
+            </a:r>
+          </a:p>
+          <a:p>
+            <a:pPr>
+              <a:spcAft>
+                <a:spcPts val="900"/>
+              </a:spcAft>
+            </a:pPr>
+            <a:r>
+              <a:rPr sz="1700" b="0">
+                <a:solidFill>
+                  <a:srgbClr val="232A26"/>
+                </a:solidFill>
+                <a:latin typeface="Verdana"/>
+              </a:rPr>
+              <a:t>Streaming every raw reading to a distant cloud is the other extreme: heavy, slow and costly at city scale.</a:t>
+            </a:r>
+          </a:p>
+          <a:p>
+            <a:pPr>
+              <a:spcAft>
+                <a:spcPts val="900"/>
+              </a:spcAft>
+            </a:pPr>
+            <a:r>
+              <a:rPr sz="1700" b="1">
+                <a:solidFill>
+                  <a:srgbClr val="C08A1F"/>
+                </a:solidFill>
+                <a:latin typeface="Verdana"/>
+              </a:rPr>
+              <a:t>What a city needs is continuous local watching, with only compact summaries and alerts leaving the street.</a:t>
+            </a:r>
+          </a:p>
+          <a:p>
+            <a:pPr>
+              <a:spcAft>
+                <a:spcPts val="900"/>
+              </a:spcAft>
+            </a:pPr>
+            <a:r>
+              <a:rPr sz="1700" b="0">
+                <a:solidFill>
+                  <a:srgbClr val="232A26"/>
+                </a:solidFill>
+                <a:latin typeface="Verdana"/>
+              </a:rPr>
+              <a:t>35 micrograms per cubic metre is the pipeline's PM2.5 alert line; an air quality breach can rise and fade between manual reads.</a:t>
+            </a:r>
+          </a:p>
+          <a:p>
+            <a:pPr>
+              <a:spcAft>
+                <a:spcPts val="900"/>
+              </a:spcAft>
+            </a:pPr>
+            <a:r>
+              <a:rPr sz="1700" b="0">
+                <a:solidFill>
+                  <a:srgbClr val="232A26"/>
+                </a:solidFill>
+                <a:latin typeface="Verdana"/>
+              </a:rPr>
+              <a:t>75 dB is the noise violation threshold; residents feel every extra minute it goes unnoticed.</a:t>
+            </a:r>
+          </a:p>
+          <a:p>
+            <a:pPr>
+              <a:spcAft>
+                <a:spcPts val="900"/>
+              </a:spcAft>
+            </a:pPr>
+            <a:r>
+              <a:rPr sz="1700" b="0">
+                <a:solidFill>
+                  <a:srgbClr val="232A26"/>
+                </a:solidFill>
+                <a:latin typeface="Verdana"/>
+              </a:rPr>
+              <a:t>Each of ten street sensors reports one reading every 2 to 5 seconds continuously, and no manual process keeps up with that.</a:t>
+            </a:r>
+          </a:p>
+        </p:txBody>
+      </p:sp>
+      <p:sp>
+        <p:nvSpPr>
           <p:cNvPr id="4" name="Rectangle 3"/>
           <p:cNvSpPr/>
           <p:nvPr/>
         </p:nvSpPr>
         <p:spPr>
           <a:xfrm>
-            <a:off x="0" y="0"/>
-            <a:ext cx="12191695" cy="1051560"/>
+            <a:off x="640080" y="457200"/>
+            <a:ext cx="868680" cy="868680"/>
           </a:xfrm>
           <a:prstGeom prst="rect">
             <a:avLst/>
@@ -3362,168 +3530,35 @@
       </p:sp>
       <p:sp>
         <p:nvSpPr>
-          <p:cNvPr id="2" name="Title 1"/>
-          <p:cNvSpPr>
-            <a:spLocks noGrp="1"/>
-          </p:cNvSpPr>
-          <p:nvPr>
-            <p:ph type="title"/>
-          </p:nvPr>
+          <p:cNvPr id="5" name="TextBox 4"/>
+          <p:cNvSpPr txBox="1"/>
+          <p:nvPr/>
         </p:nvSpPr>
         <p:spPr>
           <a:xfrm>
-            <a:off x="640080" y="0"/>
-            <a:ext cx="10972800" cy="1051560"/>
+            <a:off x="640080" y="457200"/>
+            <a:ext cx="868680" cy="868680"/>
           </a:xfrm>
+          <a:prstGeom prst="rect">
+            <a:avLst/>
+          </a:prstGeom>
+          <a:noFill/>
         </p:spPr>
         <p:txBody>
-          <a:bodyPr wrap="square" anchor="ctr"/>
-          <a:lstStyle/>
-          <a:p>
-            <a:pPr algn="l"/>
-            <a:r>
-              <a:rPr b="1" sz="2400">
+          <a:bodyPr wrap="square" anchor="ctr">
+            <a:spAutoFit/>
+          </a:bodyPr>
+          <a:lstStyle/>
+          <a:p>
+            <a:pPr algn="ctr"/>
+            <a:r>
+              <a:rPr sz="2600" b="1" i="0">
                 <a:solidFill>
                   <a:srgbClr val="FFFFFF"/>
                 </a:solidFill>
                 <a:latin typeface="Century Gothic"/>
               </a:rPr>
-              <a:t>Why occasional checking fails</a:t>
-            </a:r>
-          </a:p>
-        </p:txBody>
-      </p:sp>
-      <p:sp>
-        <p:nvSpPr>
-          <p:cNvPr id="3" name="Content Placeholder 2"/>
-          <p:cNvSpPr>
-            <a:spLocks noGrp="1"/>
-          </p:cNvSpPr>
-          <p:nvPr>
-            <p:ph idx="1"/>
-          </p:nvPr>
-        </p:nvSpPr>
-        <p:spPr>
-          <a:xfrm>
-            <a:off x="658368" y="1371600"/>
-            <a:ext cx="10972800" cy="5029200"/>
-          </a:xfrm>
-        </p:spPr>
-        <p:txBody>
-          <a:bodyPr wrap="square">
-            <a:normAutofit/>
-          </a:bodyPr>
-          <a:lstStyle/>
-          <a:p>
-            <a:pPr>
-              <a:spcAft>
-                <a:spcPts val="900"/>
-              </a:spcAft>
-            </a:pPr>
-            <a:r>
-              <a:rPr sz="1700" b="0">
-                <a:solidFill>
-                  <a:srgbClr val="232A26"/>
-                </a:solidFill>
-                <a:latin typeface="Verdana"/>
-              </a:rPr>
-              <a:t>Congestion, pollution spikes and full car parks build and fade within minutes, between any two manual checks.</a:t>
-            </a:r>
-          </a:p>
-          <a:p>
-            <a:pPr>
-              <a:spcAft>
-                <a:spcPts val="900"/>
-              </a:spcAft>
-            </a:pPr>
-            <a:r>
-              <a:rPr sz="1700" b="0">
-                <a:solidFill>
-                  <a:srgbClr val="232A26"/>
-                </a:solidFill>
-                <a:latin typeface="Verdana"/>
-              </a:rPr>
-              <a:t>A patrol or a monthly meter read captures one moment; the breach that matters happens after the clipboard leaves.</a:t>
-            </a:r>
-          </a:p>
-          <a:p>
-            <a:pPr>
-              <a:spcAft>
-                <a:spcPts val="900"/>
-              </a:spcAft>
-            </a:pPr>
-            <a:r>
-              <a:rPr sz="1700" b="0">
-                <a:solidFill>
-                  <a:srgbClr val="232A26"/>
-                </a:solidFill>
-                <a:latin typeface="Verdana"/>
-              </a:rPr>
-              <a:t>Streaming every raw reading to a distant cloud is the other extreme: heavy, slow and costly at city scale.</a:t>
-            </a:r>
-          </a:p>
-          <a:p>
-            <a:pPr>
-              <a:spcAft>
-                <a:spcPts val="900"/>
-              </a:spcAft>
-            </a:pPr>
-            <a:r>
-              <a:rPr sz="1700" b="1">
-                <a:solidFill>
-                  <a:srgbClr val="C08A1F"/>
-                </a:solidFill>
-                <a:latin typeface="Verdana"/>
-              </a:rPr>
-              <a:t>What a city needs is continuous local watching, with only compact summaries and alerts leaving the street.</a:t>
-            </a:r>
-          </a:p>
-          <a:p>
-            <a:pPr>
-              <a:spcAft>
-                <a:spcPts val="900"/>
-              </a:spcAft>
-            </a:pPr>
-            <a:r>
-              <a:rPr sz="1700" b="0">
-                <a:solidFill>
-                  <a:srgbClr val="232A26"/>
-                </a:solidFill>
-                <a:latin typeface="Verdana"/>
-              </a:rPr>
-              <a:t>35 micrograms per cubic metre is the pipeline's PM2.5 alert line; an air quality breach can rise and fade between manual reads.</a:t>
-            </a:r>
-          </a:p>
-          <a:p>
-            <a:pPr>
-              <a:spcAft>
-                <a:spcPts val="900"/>
-              </a:spcAft>
-            </a:pPr>
-            <a:r>
-              <a:rPr sz="1700" b="0">
-                <a:solidFill>
-                  <a:srgbClr val="232A26"/>
-                </a:solidFill>
-                <a:latin typeface="Verdana"/>
-              </a:rPr>
-              <a:t>75 dB is the noise violation threshold; residents feel every extra minute it goes unnoticed.</a:t>
-            </a:r>
-          </a:p>
-          <a:p>
-            <a:pPr>
-              <a:spcAft>
-                <a:spcPts val="900"/>
-              </a:spcAft>
-            </a:pPr>
-            <a:r>
-              <a:rPr sz="1700" b="0">
-                <a:solidFill>
-                  <a:srgbClr val="232A26"/>
-                </a:solidFill>
-                <a:latin typeface="Verdana"/>
-              </a:rPr>
-              <a:t>Each of ten street sensors reports one reading every 2 to 5 seconds continuously, and no manual process keeps up with that.</a:t>
+              <a:t>1</a:t>
             </a:r>
           </a:p>
         </p:txBody>
@@ -3548,14 +3583,214 @@
       <p:grpSpPr/>
       <p:sp>
         <p:nvSpPr>
+          <p:cNvPr id="2" name="Title 1"/>
+          <p:cNvSpPr>
+            <a:spLocks noGrp="1"/>
+          </p:cNvSpPr>
+          <p:nvPr>
+            <p:ph type="title"/>
+          </p:nvPr>
+        </p:nvSpPr>
+        <p:spPr>
+          <a:xfrm>
+            <a:off x="1691640" y="457200"/>
+            <a:ext cx="9875520" cy="868680"/>
+          </a:xfrm>
+        </p:spPr>
+        <p:txBody>
+          <a:bodyPr wrap="square" anchor="ctr"/>
+          <a:lstStyle/>
+          <a:p>
+            <a:pPr algn="l"/>
+            <a:r>
+              <a:rPr b="1" sz="2700">
+                <a:solidFill>
+                  <a:srgbClr val="C08A1F"/>
+                </a:solidFill>
+                <a:latin typeface="Century Gothic"/>
+              </a:rPr>
+              <a:t>How it works: edge to cloud</a:t>
+            </a:r>
+          </a:p>
+        </p:txBody>
+      </p:sp>
+      <p:sp>
+        <p:nvSpPr>
+          <p:cNvPr id="3" name="Content Placeholder 2"/>
+          <p:cNvSpPr>
+            <a:spLocks noGrp="1"/>
+          </p:cNvSpPr>
+          <p:nvPr>
+            <p:ph idx="1"/>
+          </p:nvPr>
+        </p:nvSpPr>
+        <p:spPr>
+          <a:xfrm>
+            <a:off x="658368" y="1600200"/>
+            <a:ext cx="10972800" cy="4663440"/>
+          </a:xfrm>
+        </p:spPr>
+        <p:txBody>
+          <a:bodyPr wrap="square">
+            <a:normAutofit/>
+          </a:bodyPr>
+          <a:lstStyle/>
+          <a:p>
+            <a:pPr>
+              <a:spcAft>
+                <a:spcPts val="600"/>
+              </a:spcAft>
+            </a:pPr>
+            <a:r>
+              <a:rPr sz="1500" b="1">
+                <a:solidFill>
+                  <a:srgbClr val="C08A1F"/>
+                </a:solidFill>
+                <a:latin typeface="Verdana"/>
+              </a:rPr>
+              <a:t>City edge:</a:t>
+            </a:r>
+          </a:p>
+          <a:p>
+            <a:pPr lvl="1">
+              <a:spcAft>
+                <a:spcPts val="600"/>
+              </a:spcAft>
+            </a:pPr>
+            <a:r>
+              <a:rPr sz="1300" b="0">
+                <a:solidFill>
+                  <a:srgbClr val="232A26"/>
+                </a:solidFill>
+                <a:latin typeface="Verdana"/>
+              </a:rPr>
+              <a:t>Street sensors: 10 devices, 5 metrics, 2 zones.</a:t>
+            </a:r>
+          </a:p>
+          <a:p>
+            <a:pPr lvl="1">
+              <a:spcAft>
+                <a:spcPts val="600"/>
+              </a:spcAft>
+            </a:pPr>
+            <a:r>
+              <a:rPr sz="1300" b="0">
+                <a:solidFill>
+                  <a:srgbClr val="232A26"/>
+                </a:solidFill>
+                <a:latin typeface="Verdana"/>
+              </a:rPr>
+              <a:t>Fog node windows, aggregates and alerts, with a 10 second aggregation window at the edge relay.</a:t>
+            </a:r>
+          </a:p>
+          <a:p>
+            <a:pPr>
+              <a:spcAft>
+                <a:spcPts val="600"/>
+              </a:spcAft>
+            </a:pPr>
+            <a:r>
+              <a:rPr sz="1500" b="1">
+                <a:solidFill>
+                  <a:srgbClr val="C08A1F"/>
+                </a:solidFill>
+                <a:latin typeface="Verdana"/>
+              </a:rPr>
+              <a:t>AWS cloud:</a:t>
+            </a:r>
+          </a:p>
+          <a:p>
+            <a:pPr lvl="1">
+              <a:spcAft>
+                <a:spcPts val="600"/>
+              </a:spcAft>
+            </a:pPr>
+            <a:r>
+              <a:rPr sz="1300" b="0">
+                <a:solidFill>
+                  <a:srgbClr val="232A26"/>
+                </a:solidFill>
+                <a:latin typeface="Verdana"/>
+              </a:rPr>
+              <a:t>Amazon SQS aggregate queue, AWS Lambda serverless ingest, and Amazon DynamoDB durable store.</a:t>
+            </a:r>
+          </a:p>
+          <a:p>
+            <a:pPr lvl="1">
+              <a:spcAft>
+                <a:spcPts val="600"/>
+              </a:spcAft>
+            </a:pPr>
+            <a:r>
+              <a:rPr sz="1300" b="0">
+                <a:solidFill>
+                  <a:srgbClr val="232A26"/>
+                </a:solidFill>
+                <a:latin typeface="Verdana"/>
+              </a:rPr>
+              <a:t>Live dashboard on Amazon S3 and API Gateway.</a:t>
+            </a:r>
+          </a:p>
+          <a:p>
+            <a:pPr>
+              <a:spcAft>
+                <a:spcPts val="600"/>
+              </a:spcAft>
+            </a:pPr>
+            <a:r>
+              <a:rPr sz="1500" b="0">
+                <a:solidFill>
+                  <a:srgbClr val="232A26"/>
+                </a:solidFill>
+                <a:latin typeface="Verdana"/>
+              </a:rPr>
+              <a:t>5 alert rules are assessed beside the sensors, not in the cloud.</a:t>
+            </a:r>
+          </a:p>
+          <a:p>
+            <a:pPr>
+              <a:spcAft>
+                <a:spcPts val="600"/>
+              </a:spcAft>
+            </a:pPr>
+            <a:r>
+              <a:rPr sz="1500" b="0">
+                <a:solidFill>
+                  <a:srgbClr val="232A26"/>
+                </a:solidFill>
+                <a:latin typeface="Verdana"/>
+              </a:rPr>
+              <a:t>1 scripted step: verified locally on an AWS emulator, deploys to AWS unchanged.</a:t>
+            </a:r>
+          </a:p>
+          <a:p>
+            <a:pPr>
+              <a:spcAft>
+                <a:spcPts val="600"/>
+              </a:spcAft>
+            </a:pPr>
+            <a:r>
+              <a:rPr sz="1500" b="1">
+                <a:solidFill>
+                  <a:srgbClr val="C08A1F"/>
+                </a:solidFill>
+                <a:latin typeface="Verdana"/>
+              </a:rPr>
+              <a:t>Each zone and metric leaves the street as one compact summary every ten seconds, alerts already attached.</a:t>
+            </a:r>
+          </a:p>
+        </p:txBody>
+      </p:sp>
+      <p:sp>
+        <p:nvSpPr>
           <p:cNvPr id="4" name="Rectangle 3"/>
           <p:cNvSpPr/>
           <p:nvPr/>
         </p:nvSpPr>
         <p:spPr>
           <a:xfrm>
-            <a:off x="0" y="0"/>
-            <a:ext cx="12191695" cy="1051560"/>
+            <a:off x="640080" y="457200"/>
+            <a:ext cx="868680" cy="868680"/>
           </a:xfrm>
           <a:prstGeom prst="rect">
             <a:avLst/>
@@ -3592,200 +3827,35 @@
       </p:sp>
       <p:sp>
         <p:nvSpPr>
-          <p:cNvPr id="2" name="Title 1"/>
-          <p:cNvSpPr>
-            <a:spLocks noGrp="1"/>
-          </p:cNvSpPr>
-          <p:nvPr>
-            <p:ph type="title"/>
-          </p:nvPr>
+          <p:cNvPr id="5" name="TextBox 4"/>
+          <p:cNvSpPr txBox="1"/>
+          <p:nvPr/>
         </p:nvSpPr>
         <p:spPr>
           <a:xfrm>
-            <a:off x="640080" y="0"/>
-            <a:ext cx="10972800" cy="1051560"/>
+            <a:off x="640080" y="457200"/>
+            <a:ext cx="868680" cy="868680"/>
           </a:xfrm>
+          <a:prstGeom prst="rect">
+            <a:avLst/>
+          </a:prstGeom>
+          <a:noFill/>
         </p:spPr>
         <p:txBody>
-          <a:bodyPr wrap="square" anchor="ctr"/>
-          <a:lstStyle/>
-          <a:p>
-            <a:pPr algn="l"/>
-            <a:r>
-              <a:rPr b="1" sz="2400">
+          <a:bodyPr wrap="square" anchor="ctr">
+            <a:spAutoFit/>
+          </a:bodyPr>
+          <a:lstStyle/>
+          <a:p>
+            <a:pPr algn="ctr"/>
+            <a:r>
+              <a:rPr sz="2600" b="1" i="0">
                 <a:solidFill>
                   <a:srgbClr val="FFFFFF"/>
                 </a:solidFill>
                 <a:latin typeface="Century Gothic"/>
               </a:rPr>
-              <a:t>How it works: edge to cloud</a:t>
-            </a:r>
-          </a:p>
-        </p:txBody>
-      </p:sp>
-      <p:sp>
-        <p:nvSpPr>
-          <p:cNvPr id="3" name="Content Placeholder 2"/>
-          <p:cNvSpPr>
-            <a:spLocks noGrp="1"/>
-          </p:cNvSpPr>
-          <p:nvPr>
-            <p:ph idx="1"/>
-          </p:nvPr>
-        </p:nvSpPr>
-        <p:spPr>
-          <a:xfrm>
-            <a:off x="658368" y="1371600"/>
-            <a:ext cx="10972800" cy="5029200"/>
-          </a:xfrm>
-        </p:spPr>
-        <p:txBody>
-          <a:bodyPr wrap="square">
-            <a:normAutofit/>
-          </a:bodyPr>
-          <a:lstStyle/>
-          <a:p>
-            <a:pPr>
-              <a:spcAft>
-                <a:spcPts val="600"/>
-              </a:spcAft>
-            </a:pPr>
-            <a:r>
-              <a:rPr sz="1500" b="1">
-                <a:solidFill>
-                  <a:srgbClr val="C08A1F"/>
-                </a:solidFill>
-                <a:latin typeface="Verdana"/>
-              </a:rPr>
-              <a:t>City edge:</a:t>
-            </a:r>
-          </a:p>
-          <a:p>
-            <a:pPr lvl="1">
-              <a:spcAft>
-                <a:spcPts val="600"/>
-              </a:spcAft>
-            </a:pPr>
-            <a:r>
-              <a:rPr sz="1300" b="0">
-                <a:solidFill>
-                  <a:srgbClr val="232A26"/>
-                </a:solidFill>
-                <a:latin typeface="Verdana"/>
-              </a:rPr>
-              <a:t>Street sensors: 10 devices, 5 metrics, 2 zones.</a:t>
-            </a:r>
-          </a:p>
-          <a:p>
-            <a:pPr lvl="1">
-              <a:spcAft>
-                <a:spcPts val="600"/>
-              </a:spcAft>
-            </a:pPr>
-            <a:r>
-              <a:rPr sz="1300" b="0">
-                <a:solidFill>
-                  <a:srgbClr val="232A26"/>
-                </a:solidFill>
-                <a:latin typeface="Verdana"/>
-              </a:rPr>
-              <a:t>Fog node windows, aggregates and alerts, with a 10 second aggregation window at the edge relay.</a:t>
-            </a:r>
-          </a:p>
-          <a:p>
-            <a:pPr>
-              <a:spcAft>
-                <a:spcPts val="600"/>
-              </a:spcAft>
-            </a:pPr>
-            <a:r>
-              <a:rPr sz="1500" b="1">
-                <a:solidFill>
-                  <a:srgbClr val="C08A1F"/>
-                </a:solidFill>
-                <a:latin typeface="Verdana"/>
-              </a:rPr>
-              <a:t>AWS cloud:</a:t>
-            </a:r>
-          </a:p>
-          <a:p>
-            <a:pPr lvl="1">
-              <a:spcAft>
-                <a:spcPts val="600"/>
-              </a:spcAft>
-            </a:pPr>
-            <a:r>
-              <a:rPr sz="1300" b="0">
-                <a:solidFill>
-                  <a:srgbClr val="232A26"/>
-                </a:solidFill>
-                <a:latin typeface="Verdana"/>
-              </a:rPr>
-              <a:t>Amazon SQS aggregate queue, AWS Lambda serverless ingest, and Amazon DynamoDB durable store.</a:t>
-            </a:r>
-          </a:p>
-          <a:p>
-            <a:pPr lvl="1">
-              <a:spcAft>
-                <a:spcPts val="600"/>
-              </a:spcAft>
-            </a:pPr>
-            <a:r>
-              <a:rPr sz="1300" b="0">
-                <a:solidFill>
-                  <a:srgbClr val="232A26"/>
-                </a:solidFill>
-                <a:latin typeface="Verdana"/>
-              </a:rPr>
-              <a:t>Live dashboard on Amazon S3 and API Gateway.</a:t>
-            </a:r>
-          </a:p>
-          <a:p>
-            <a:pPr>
-              <a:spcAft>
-                <a:spcPts val="600"/>
-              </a:spcAft>
-            </a:pPr>
-            <a:r>
-              <a:rPr sz="1500" b="0">
-                <a:solidFill>
-                  <a:srgbClr val="232A26"/>
-                </a:solidFill>
-                <a:latin typeface="Verdana"/>
-              </a:rPr>
-              <a:t>5 alert rules are assessed beside the sensors, not in the cloud.</a:t>
-            </a:r>
-          </a:p>
-          <a:p>
-            <a:pPr>
-              <a:spcAft>
-                <a:spcPts val="600"/>
-              </a:spcAft>
-            </a:pPr>
-            <a:r>
-              <a:rPr sz="1500" b="0">
-                <a:solidFill>
-                  <a:srgbClr val="232A26"/>
-                </a:solidFill>
-                <a:latin typeface="Verdana"/>
-              </a:rPr>
-              <a:t>1 scripted step: verified locally on an AWS emulator, deploys to AWS unchanged.</a:t>
-            </a:r>
-          </a:p>
-          <a:p>
-            <a:pPr>
-              <a:spcAft>
-                <a:spcPts val="600"/>
-              </a:spcAft>
-            </a:pPr>
-            <a:r>
-              <a:rPr sz="1500" b="1">
-                <a:solidFill>
-                  <a:srgbClr val="C08A1F"/>
-                </a:solidFill>
-                <a:latin typeface="Verdana"/>
-              </a:rPr>
-              <a:t>Each zone and metric leaves the street as one compact summary every ten seconds, alerts already attached.</a:t>
+              <a:t>2</a:t>
             </a:r>
           </a:p>
         </p:txBody>
@@ -3810,14 +3880,166 @@
       <p:grpSpPr/>
       <p:sp>
         <p:nvSpPr>
+          <p:cNvPr id="2" name="Title 1"/>
+          <p:cNvSpPr>
+            <a:spLocks noGrp="1"/>
+          </p:cNvSpPr>
+          <p:nvPr>
+            <p:ph type="title"/>
+          </p:nvPr>
+        </p:nvSpPr>
+        <p:spPr>
+          <a:xfrm>
+            <a:off x="1691640" y="457200"/>
+            <a:ext cx="9875520" cy="868680"/>
+          </a:xfrm>
+        </p:spPr>
+        <p:txBody>
+          <a:bodyPr wrap="square" anchor="ctr"/>
+          <a:lstStyle/>
+          <a:p>
+            <a:pPr algn="l"/>
+            <a:r>
+              <a:rPr b="1" sz="2700">
+                <a:solidFill>
+                  <a:srgbClr val="C08A1F"/>
+                </a:solidFill>
+                <a:latin typeface="Century Gothic"/>
+              </a:rPr>
+              <a:t>Demonstration highlights</a:t>
+            </a:r>
+          </a:p>
+        </p:txBody>
+      </p:sp>
+      <p:sp>
+        <p:nvSpPr>
+          <p:cNvPr id="3" name="Content Placeholder 2"/>
+          <p:cNvSpPr>
+            <a:spLocks noGrp="1"/>
+          </p:cNvSpPr>
+          <p:nvPr>
+            <p:ph idx="1"/>
+          </p:nvPr>
+        </p:nvSpPr>
+        <p:spPr>
+          <a:xfrm>
+            <a:off x="658368" y="1600200"/>
+            <a:ext cx="5760720" cy="4572000"/>
+          </a:xfrm>
+        </p:spPr>
+        <p:txBody>
+          <a:bodyPr wrap="square">
+            <a:normAutofit/>
+          </a:bodyPr>
+          <a:lstStyle/>
+          <a:p>
+            <a:pPr>
+              <a:spcAft>
+                <a:spcPts val="800"/>
+              </a:spcAft>
+            </a:pPr>
+            <a:r>
+              <a:rPr sz="1500" b="0">
+                <a:solidFill>
+                  <a:srgbClr val="232A26"/>
+                </a:solidFill>
+                <a:latin typeface="Verdana"/>
+              </a:rPr>
+              <a:t>Dashboard captured from the running stack.</a:t>
+            </a:r>
+          </a:p>
+          <a:p>
+            <a:pPr>
+              <a:spcAft>
+                <a:spcPts val="800"/>
+              </a:spcAft>
+            </a:pPr>
+            <a:r>
+              <a:rPr sz="1500" b="0">
+                <a:solidFill>
+                  <a:srgbClr val="232A26"/>
+                </a:solidFill>
+                <a:latin typeface="Verdana"/>
+              </a:rPr>
+              <a:t>Two zones reporting, five metrics per zone, citywide trend charts, and the health footer along the bottom edge.</a:t>
+            </a:r>
+          </a:p>
+          <a:p>
+            <a:pPr>
+              <a:spcAft>
+                <a:spcPts val="800"/>
+              </a:spcAft>
+            </a:pPr>
+            <a:r>
+              <a:rPr sz="1500" b="1">
+                <a:solidFill>
+                  <a:srgbClr val="C08A1F"/>
+                </a:solidFill>
+                <a:latin typeface="Verdana"/>
+              </a:rPr>
+              <a:t>All pipeline health checks green: edge relay online, queue reachable, Lambda deployed, records archived.</a:t>
+            </a:r>
+          </a:p>
+          <a:p>
+            <a:pPr>
+              <a:spcAft>
+                <a:spcPts val="800"/>
+              </a:spcAft>
+            </a:pPr>
+            <a:r>
+              <a:rPr sz="1500" b="0">
+                <a:solidFill>
+                  <a:srgbClr val="232A26"/>
+                </a:solidFill>
+                <a:latin typeface="Verdana"/>
+              </a:rPr>
+              <a:t>61 automated tests pass across the sensor, fog, processor and dashboard modules.</a:t>
+            </a:r>
+          </a:p>
+          <a:p>
+            <a:pPr>
+              <a:spcAft>
+                <a:spcPts val="800"/>
+              </a:spcAft>
+            </a:pPr>
+            <a:r>
+              <a:rPr sz="1500" b="0">
+                <a:solidFill>
+                  <a:srgbClr val="232A26"/>
+                </a:solidFill>
+                <a:latin typeface="Verdana"/>
+              </a:rPr>
+              <a:t>2,000-message burst absorbed: load test fired through 32 parallel workers as scalability evidence.</a:t>
+            </a:r>
+          </a:p>
+          <a:p>
+            <a:pPr>
+              <a:spcAft>
+                <a:spcPts val="800"/>
+              </a:spcAft>
+            </a:pPr>
+            <a:r>
+              <a:rPr sz="1500" b="0">
+                <a:solidFill>
+                  <a:srgbClr val="232A26"/>
+                </a:solidFill>
+                <a:latin typeface="Verdana"/>
+              </a:rPr>
+              <a:t>Five alert rules fire live: congestion, air quality, noise, parking and low visibility.</a:t>
+            </a:r>
+          </a:p>
+        </p:txBody>
+      </p:sp>
+      <p:sp>
+        <p:nvSpPr>
           <p:cNvPr id="4" name="Rectangle 3"/>
           <p:cNvSpPr/>
           <p:nvPr/>
         </p:nvSpPr>
         <p:spPr>
           <a:xfrm>
-            <a:off x="0" y="0"/>
-            <a:ext cx="12191695" cy="1051560"/>
+            <a:off x="640080" y="457200"/>
+            <a:ext cx="868680" cy="868680"/>
           </a:xfrm>
           <a:prstGeom prst="rect">
             <a:avLst/>
@@ -3854,159 +4076,42 @@
       </p:sp>
       <p:sp>
         <p:nvSpPr>
-          <p:cNvPr id="2" name="Title 1"/>
-          <p:cNvSpPr>
-            <a:spLocks noGrp="1"/>
-          </p:cNvSpPr>
-          <p:nvPr>
-            <p:ph type="title"/>
-          </p:nvPr>
+          <p:cNvPr id="5" name="TextBox 4"/>
+          <p:cNvSpPr txBox="1"/>
+          <p:nvPr/>
         </p:nvSpPr>
         <p:spPr>
           <a:xfrm>
-            <a:off x="640080" y="0"/>
-            <a:ext cx="10972800" cy="1051560"/>
+            <a:off x="640080" y="457200"/>
+            <a:ext cx="868680" cy="868680"/>
           </a:xfrm>
+          <a:prstGeom prst="rect">
+            <a:avLst/>
+          </a:prstGeom>
+          <a:noFill/>
         </p:spPr>
         <p:txBody>
-          <a:bodyPr wrap="square" anchor="ctr"/>
-          <a:lstStyle/>
-          <a:p>
-            <a:pPr algn="l"/>
-            <a:r>
-              <a:rPr b="1" sz="2400">
+          <a:bodyPr wrap="square" anchor="ctr">
+            <a:spAutoFit/>
+          </a:bodyPr>
+          <a:lstStyle/>
+          <a:p>
+            <a:pPr algn="ctr"/>
+            <a:r>
+              <a:rPr sz="2600" b="1" i="0">
                 <a:solidFill>
                   <a:srgbClr val="FFFFFF"/>
                 </a:solidFill>
                 <a:latin typeface="Century Gothic"/>
               </a:rPr>
-              <a:t>Demonstration highlights</a:t>
-            </a:r>
-          </a:p>
-        </p:txBody>
-      </p:sp>
-      <p:sp>
-        <p:nvSpPr>
-          <p:cNvPr id="3" name="Content Placeholder 2"/>
-          <p:cNvSpPr>
-            <a:spLocks noGrp="1"/>
-          </p:cNvSpPr>
-          <p:nvPr>
-            <p:ph idx="1"/>
-          </p:nvPr>
-        </p:nvSpPr>
-        <p:spPr>
-          <a:xfrm>
-            <a:off x="658368" y="1371600"/>
-            <a:ext cx="5760720" cy="4937760"/>
-          </a:xfrm>
-        </p:spPr>
-        <p:txBody>
-          <a:bodyPr wrap="square">
-            <a:normAutofit/>
-          </a:bodyPr>
-          <a:lstStyle/>
-          <a:p>
-            <a:pPr>
-              <a:spcAft>
-                <a:spcPts val="800"/>
-              </a:spcAft>
-            </a:pPr>
-            <a:r>
-              <a:rPr sz="1500" b="0">
-                <a:solidFill>
-                  <a:srgbClr val="232A26"/>
-                </a:solidFill>
-                <a:latin typeface="Verdana"/>
-              </a:rPr>
-              <a:t>Dashboard captured from the running stack.</a:t>
-            </a:r>
-          </a:p>
-          <a:p>
-            <a:pPr>
-              <a:spcAft>
-                <a:spcPts val="800"/>
-              </a:spcAft>
-            </a:pPr>
-            <a:r>
-              <a:rPr sz="1500" b="0">
-                <a:solidFill>
-                  <a:srgbClr val="232A26"/>
-                </a:solidFill>
-                <a:latin typeface="Verdana"/>
-              </a:rPr>
-              <a:t>Two zones reporting, five metrics per zone, citywide trend charts, and the health footer along the bottom edge.</a:t>
-            </a:r>
-          </a:p>
-          <a:p>
-            <a:pPr>
-              <a:spcAft>
-                <a:spcPts val="800"/>
-              </a:spcAft>
-            </a:pPr>
-            <a:r>
-              <a:rPr sz="1500" b="1">
-                <a:solidFill>
-                  <a:srgbClr val="C08A1F"/>
-                </a:solidFill>
-                <a:latin typeface="Verdana"/>
-              </a:rPr>
-              <a:t>All pipeline health checks green: edge relay online, queue reachable, Lambda deployed, records archived.</a:t>
-            </a:r>
-          </a:p>
-          <a:p>
-            <a:pPr>
-              <a:spcAft>
-                <a:spcPts val="800"/>
-              </a:spcAft>
-            </a:pPr>
-            <a:r>
-              <a:rPr sz="1500" b="0">
-                <a:solidFill>
-                  <a:srgbClr val="232A26"/>
-                </a:solidFill>
-                <a:latin typeface="Verdana"/>
-              </a:rPr>
-              <a:t>61 automated tests pass across the sensor, fog, processor and dashboard modules.</a:t>
-            </a:r>
-          </a:p>
-          <a:p>
-            <a:pPr>
-              <a:spcAft>
-                <a:spcPts val="800"/>
-              </a:spcAft>
-            </a:pPr>
-            <a:r>
-              <a:rPr sz="1500" b="0">
-                <a:solidFill>
-                  <a:srgbClr val="232A26"/>
-                </a:solidFill>
-                <a:latin typeface="Verdana"/>
-              </a:rPr>
-              <a:t>2,000-message burst absorbed: load test fired through 32 parallel workers as scalability evidence.</a:t>
-            </a:r>
-          </a:p>
-          <a:p>
-            <a:pPr>
-              <a:spcAft>
-                <a:spcPts val="800"/>
-              </a:spcAft>
-            </a:pPr>
-            <a:r>
-              <a:rPr sz="1500" b="0">
-                <a:solidFill>
-                  <a:srgbClr val="232A26"/>
-                </a:solidFill>
-                <a:latin typeface="Verdana"/>
-              </a:rPr>
-              <a:t>Five alert rules fire live: congestion, air quality, noise, parking and low visibility.</a:t>
+              <a:t>3</a:t>
             </a:r>
           </a:p>
         </p:txBody>
       </p:sp>
       <p:pic>
         <p:nvPicPr>
-          <p:cNvPr id="5" name="Picture 4" descr="dashboard-desktop.png"/>
+          <p:cNvPr id="6" name="Picture 5" descr="dashboard-desktop.png"/>
           <p:cNvPicPr>
             <a:picLocks noChangeAspect="1"/>
           </p:cNvPicPr>
@@ -4020,7 +4125,7 @@
         </p:blipFill>
         <p:spPr>
           <a:xfrm>
-            <a:off x="6629400" y="1748789"/>
+            <a:off x="6629400" y="1840230"/>
             <a:ext cx="5120640" cy="4000500"/>
           </a:xfrm>
           <a:prstGeom prst="rect">
@@ -4048,14 +4153,198 @@
       <p:grpSpPr/>
       <p:sp>
         <p:nvSpPr>
+          <p:cNvPr id="2" name="Title 1"/>
+          <p:cNvSpPr>
+            <a:spLocks noGrp="1"/>
+          </p:cNvSpPr>
+          <p:nvPr>
+            <p:ph type="title"/>
+          </p:nvPr>
+        </p:nvSpPr>
+        <p:spPr>
+          <a:xfrm>
+            <a:off x="1691640" y="457200"/>
+            <a:ext cx="9875520" cy="868680"/>
+          </a:xfrm>
+        </p:spPr>
+        <p:txBody>
+          <a:bodyPr wrap="square" anchor="ctr"/>
+          <a:lstStyle/>
+          <a:p>
+            <a:pPr algn="l"/>
+            <a:r>
+              <a:rPr b="1" sz="2700">
+                <a:solidFill>
+                  <a:srgbClr val="C08A1F"/>
+                </a:solidFill>
+                <a:latin typeface="Century Gothic"/>
+              </a:rPr>
+              <a:t>The hardest part: a silent race</a:t>
+            </a:r>
+          </a:p>
+        </p:txBody>
+      </p:sp>
+      <p:sp>
+        <p:nvSpPr>
+          <p:cNvPr id="3" name="Content Placeholder 2"/>
+          <p:cNvSpPr>
+            <a:spLocks noGrp="1"/>
+          </p:cNvSpPr>
+          <p:nvPr>
+            <p:ph idx="1"/>
+          </p:nvPr>
+        </p:nvSpPr>
+        <p:spPr>
+          <a:xfrm>
+            <a:off x="658368" y="1600200"/>
+            <a:ext cx="10972800" cy="4663440"/>
+          </a:xfrm>
+        </p:spPr>
+        <p:txBody>
+          <a:bodyPr wrap="square">
+            <a:normAutofit/>
+          </a:bodyPr>
+          <a:lstStyle/>
+          <a:p>
+            <a:pPr>
+              <a:spcAft>
+                <a:spcPts val="600"/>
+              </a:spcAft>
+            </a:pPr>
+            <a:r>
+              <a:rPr sz="1500" b="0">
+                <a:solidFill>
+                  <a:srgbClr val="232A26"/>
+                </a:solidFill>
+                <a:latin typeface="Verdana"/>
+              </a:rPr>
+              <a:t>Every ten seconds the fog node hands its buffer over for flushing. What happens to a reading that arrives at that exact instant?</a:t>
+            </a:r>
+          </a:p>
+          <a:p>
+            <a:pPr>
+              <a:spcAft>
+                <a:spcPts val="600"/>
+              </a:spcAft>
+            </a:pPr>
+            <a:r>
+              <a:rPr sz="1500" b="1">
+                <a:solidFill>
+                  <a:srgbClr val="C08A1F"/>
+                </a:solidFill>
+                <a:latin typeface="Verdana"/>
+              </a:rPr>
+              <a:t>The problem:</a:t>
+            </a:r>
+          </a:p>
+          <a:p>
+            <a:pPr lvl="1">
+              <a:spcAft>
+                <a:spcPts val="600"/>
+              </a:spcAft>
+            </a:pPr>
+            <a:r>
+              <a:rPr sz="1300" b="0">
+                <a:solidFill>
+                  <a:srgbClr val="232A26"/>
+                </a:solidFill>
+                <a:latin typeface="Verdana"/>
+              </a:rPr>
+              <a:t>Sensor posts run on four parallel threads while a timer swaps the window buffer out for flushing. A reading landing mid-swap can be written into the retired buffer after the flush has already read it, and it simply vanishes.</a:t>
+            </a:r>
+          </a:p>
+          <a:p>
+            <a:pPr>
+              <a:spcAft>
+                <a:spcPts val="600"/>
+              </a:spcAft>
+            </a:pPr>
+            <a:r>
+              <a:rPr sz="1500" b="1">
+                <a:solidFill>
+                  <a:srgbClr val="C08A1F"/>
+                </a:solidFill>
+                <a:latin typeface="Verdana"/>
+              </a:rPr>
+              <a:t>Why it was hard:</a:t>
+            </a:r>
+          </a:p>
+          <a:p>
+            <a:pPr lvl="1">
+              <a:spcAft>
+                <a:spcPts val="600"/>
+              </a:spcAft>
+            </a:pPr>
+            <a:r>
+              <a:rPr sz="1300" b="0">
+                <a:solidFill>
+                  <a:srgbClr val="232A26"/>
+                </a:solidFill>
+                <a:latin typeface="Verdana"/>
+              </a:rPr>
+              <a:t>Nothing fails: no exception, no log line, just one number quietly missing from a summary. The timing hole is microseconds wide, so ordinary tests pass every time and the loss would only surface under real concurrent load.</a:t>
+            </a:r>
+          </a:p>
+          <a:p>
+            <a:pPr>
+              <a:spcAft>
+                <a:spcPts val="600"/>
+              </a:spcAft>
+            </a:pPr>
+            <a:r>
+              <a:rPr sz="1500" b="1">
+                <a:solidFill>
+                  <a:srgbClr val="C08A1F"/>
+                </a:solidFill>
+                <a:latin typeface="Verdana"/>
+              </a:rPr>
+              <a:t>The fix:</a:t>
+            </a:r>
+          </a:p>
+          <a:p>
+            <a:pPr lvl="1">
+              <a:spcAft>
+                <a:spcPts val="600"/>
+              </a:spcAft>
+            </a:pPr>
+            <a:r>
+              <a:rPr sz="1300" b="0">
+                <a:solidFill>
+                  <a:srgbClr val="232A26"/>
+                </a:solidFill>
+                <a:latin typeface="Verdana"/>
+              </a:rPr>
+              <a:t>Each buffer became a fenced generation. The flush closes the fence, waits for writers already inside to finish, then reads. A writer arriving after the fence is turned away and retries into the fresh buffer instead.</a:t>
+            </a:r>
+          </a:p>
+          <a:p>
+            <a:pPr>
+              <a:spcAft>
+                <a:spcPts val="600"/>
+              </a:spcAft>
+            </a:pPr>
+            <a:r>
+              <a:rPr sz="1500" b="1">
+                <a:solidFill>
+                  <a:srgbClr val="C08A1F"/>
+                </a:solidFill>
+                <a:latin typeface="Verdana"/>
+              </a:rPr>
+              <a:t>The ingest path stays lock-free; every reading now lands in exactly one window, guaranteed by the fence rather than a global lock.</a:t>
+            </a:r>
+          </a:p>
+        </p:txBody>
+      </p:sp>
+      <p:sp>
+        <p:nvSpPr>
           <p:cNvPr id="4" name="Rectangle 3"/>
           <p:cNvSpPr/>
           <p:nvPr/>
         </p:nvSpPr>
         <p:spPr>
           <a:xfrm>
-            <a:off x="0" y="0"/>
-            <a:ext cx="12191695" cy="1051560"/>
+            <a:off x="640080" y="457200"/>
+            <a:ext cx="868680" cy="868680"/>
           </a:xfrm>
           <a:prstGeom prst="rect">
             <a:avLst/>
@@ -4092,184 +4381,35 @@
       </p:sp>
       <p:sp>
         <p:nvSpPr>
-          <p:cNvPr id="2" name="Title 1"/>
-          <p:cNvSpPr>
-            <a:spLocks noGrp="1"/>
-          </p:cNvSpPr>
-          <p:nvPr>
-            <p:ph type="title"/>
-          </p:nvPr>
+          <p:cNvPr id="5" name="TextBox 4"/>
+          <p:cNvSpPr txBox="1"/>
+          <p:nvPr/>
         </p:nvSpPr>
         <p:spPr>
           <a:xfrm>
-            <a:off x="640080" y="0"/>
-            <a:ext cx="10972800" cy="1051560"/>
+            <a:off x="640080" y="457200"/>
+            <a:ext cx="868680" cy="868680"/>
           </a:xfrm>
+          <a:prstGeom prst="rect">
+            <a:avLst/>
+          </a:prstGeom>
+          <a:noFill/>
         </p:spPr>
         <p:txBody>
-          <a:bodyPr wrap="square" anchor="ctr"/>
-          <a:lstStyle/>
-          <a:p>
-            <a:pPr algn="l"/>
-            <a:r>
-              <a:rPr b="1" sz="2400">
+          <a:bodyPr wrap="square" anchor="ctr">
+            <a:spAutoFit/>
+          </a:bodyPr>
+          <a:lstStyle/>
+          <a:p>
+            <a:pPr algn="ctr"/>
+            <a:r>
+              <a:rPr sz="2600" b="1" i="0">
                 <a:solidFill>
                   <a:srgbClr val="FFFFFF"/>
                 </a:solidFill>
                 <a:latin typeface="Century Gothic"/>
               </a:rPr>
-              <a:t>The hardest part: a silent race</a:t>
-            </a:r>
-          </a:p>
-        </p:txBody>
-      </p:sp>
-      <p:sp>
-        <p:nvSpPr>
-          <p:cNvPr id="3" name="Content Placeholder 2"/>
-          <p:cNvSpPr>
-            <a:spLocks noGrp="1"/>
-          </p:cNvSpPr>
-          <p:nvPr>
-            <p:ph idx="1"/>
-          </p:nvPr>
-        </p:nvSpPr>
-        <p:spPr>
-          <a:xfrm>
-            <a:off x="658368" y="1371600"/>
-            <a:ext cx="10972800" cy="5029200"/>
-          </a:xfrm>
-        </p:spPr>
-        <p:txBody>
-          <a:bodyPr wrap="square">
-            <a:normAutofit/>
-          </a:bodyPr>
-          <a:lstStyle/>
-          <a:p>
-            <a:pPr>
-              <a:spcAft>
-                <a:spcPts val="600"/>
-              </a:spcAft>
-            </a:pPr>
-            <a:r>
-              <a:rPr sz="1500" b="0">
-                <a:solidFill>
-                  <a:srgbClr val="232A26"/>
-                </a:solidFill>
-                <a:latin typeface="Verdana"/>
-              </a:rPr>
-              <a:t>Every ten seconds the fog node hands its buffer over for flushing. What happens to a reading that arrives at that exact instant?</a:t>
-            </a:r>
-          </a:p>
-          <a:p>
-            <a:pPr>
-              <a:spcAft>
-                <a:spcPts val="600"/>
-              </a:spcAft>
-            </a:pPr>
-            <a:r>
-              <a:rPr sz="1500" b="1">
-                <a:solidFill>
-                  <a:srgbClr val="C08A1F"/>
-                </a:solidFill>
-                <a:latin typeface="Verdana"/>
-              </a:rPr>
-              <a:t>The problem:</a:t>
-            </a:r>
-          </a:p>
-          <a:p>
-            <a:pPr lvl="1">
-              <a:spcAft>
-                <a:spcPts val="600"/>
-              </a:spcAft>
-            </a:pPr>
-            <a:r>
-              <a:rPr sz="1300" b="0">
-                <a:solidFill>
-                  <a:srgbClr val="232A26"/>
-                </a:solidFill>
-                <a:latin typeface="Verdana"/>
-              </a:rPr>
-              <a:t>Sensor posts run on four parallel threads while a timer swaps the window buffer out for flushing. A reading landing mid-swap can be written into the retired buffer after the flush has already read it, and it simply vanishes.</a:t>
-            </a:r>
-          </a:p>
-          <a:p>
-            <a:pPr>
-              <a:spcAft>
-                <a:spcPts val="600"/>
-              </a:spcAft>
-            </a:pPr>
-            <a:r>
-              <a:rPr sz="1500" b="1">
-                <a:solidFill>
-                  <a:srgbClr val="C08A1F"/>
-                </a:solidFill>
-                <a:latin typeface="Verdana"/>
-              </a:rPr>
-              <a:t>Why it was hard:</a:t>
-            </a:r>
-          </a:p>
-          <a:p>
-            <a:pPr lvl="1">
-              <a:spcAft>
-                <a:spcPts val="600"/>
-              </a:spcAft>
-            </a:pPr>
-            <a:r>
-              <a:rPr sz="1300" b="0">
-                <a:solidFill>
-                  <a:srgbClr val="232A26"/>
-                </a:solidFill>
-                <a:latin typeface="Verdana"/>
-              </a:rPr>
-              <a:t>Nothing fails: no exception, no log line, just one number quietly missing from a summary. The timing hole is microseconds wide, so ordinary tests pass every time and the loss would only surface under real concurrent load.</a:t>
-            </a:r>
-          </a:p>
-          <a:p>
-            <a:pPr>
-              <a:spcAft>
-                <a:spcPts val="600"/>
-              </a:spcAft>
-            </a:pPr>
-            <a:r>
-              <a:rPr sz="1500" b="1">
-                <a:solidFill>
-                  <a:srgbClr val="C08A1F"/>
-                </a:solidFill>
-                <a:latin typeface="Verdana"/>
-              </a:rPr>
-              <a:t>The fix:</a:t>
-            </a:r>
-          </a:p>
-          <a:p>
-            <a:pPr lvl="1">
-              <a:spcAft>
-                <a:spcPts val="600"/>
-              </a:spcAft>
-            </a:pPr>
-            <a:r>
-              <a:rPr sz="1300" b="0">
-                <a:solidFill>
-                  <a:srgbClr val="232A26"/>
-                </a:solidFill>
-                <a:latin typeface="Verdana"/>
-              </a:rPr>
-              <a:t>Each buffer became a fenced generation. The flush closes the fence, waits for writers already inside to finish, then reads. A writer arriving after the fence is turned away and retries into the fresh buffer instead.</a:t>
-            </a:r>
-          </a:p>
-          <a:p>
-            <a:pPr>
-              <a:spcAft>
-                <a:spcPts val="600"/>
-              </a:spcAft>
-            </a:pPr>
-            <a:r>
-              <a:rPr sz="1500" b="1">
-                <a:solidFill>
-                  <a:srgbClr val="C08A1F"/>
-                </a:solidFill>
-                <a:latin typeface="Verdana"/>
-              </a:rPr>
-              <a:t>The ingest path stays lock-free; every reading now lands in exactly one window, guaranteed by the fence rather than a global lock.</a:t>
+              <a:t>4</a:t>
             </a:r>
           </a:p>
         </p:txBody>
@@ -4294,14 +4434,134 @@
       <p:grpSpPr/>
       <p:sp>
         <p:nvSpPr>
+          <p:cNvPr id="2" name="Title 1"/>
+          <p:cNvSpPr>
+            <a:spLocks noGrp="1"/>
+          </p:cNvSpPr>
+          <p:nvPr>
+            <p:ph type="title"/>
+          </p:nvPr>
+        </p:nvSpPr>
+        <p:spPr>
+          <a:xfrm>
+            <a:off x="1691640" y="457200"/>
+            <a:ext cx="9875520" cy="868680"/>
+          </a:xfrm>
+        </p:spPr>
+        <p:txBody>
+          <a:bodyPr wrap="square" anchor="ctr"/>
+          <a:lstStyle/>
+          <a:p>
+            <a:pPr algn="l"/>
+            <a:r>
+              <a:rPr b="1" sz="2700">
+                <a:solidFill>
+                  <a:srgbClr val="C08A1F"/>
+                </a:solidFill>
+                <a:latin typeface="Century Gothic"/>
+              </a:rPr>
+              <a:t>Three things to take away</a:t>
+            </a:r>
+          </a:p>
+        </p:txBody>
+      </p:sp>
+      <p:sp>
+        <p:nvSpPr>
+          <p:cNvPr id="3" name="Content Placeholder 2"/>
+          <p:cNvSpPr>
+            <a:spLocks noGrp="1"/>
+          </p:cNvSpPr>
+          <p:nvPr>
+            <p:ph idx="1"/>
+          </p:nvPr>
+        </p:nvSpPr>
+        <p:spPr>
+          <a:xfrm>
+            <a:off x="658368" y="1600200"/>
+            <a:ext cx="10972800" cy="4663440"/>
+          </a:xfrm>
+        </p:spPr>
+        <p:txBody>
+          <a:bodyPr wrap="square">
+            <a:normAutofit/>
+          </a:bodyPr>
+          <a:lstStyle/>
+          <a:p>
+            <a:pPr>
+              <a:spcAft>
+                <a:spcPts val="900"/>
+              </a:spcAft>
+            </a:pPr>
+            <a:r>
+              <a:rPr sz="1700" b="0">
+                <a:solidFill>
+                  <a:srgbClr val="232A26"/>
+                </a:solidFill>
+                <a:latin typeface="Verdana"/>
+              </a:rPr>
+              <a:t>Alerts are computed beside the sensors: ten seconds from street reading to raised incident, and only compact summaries ever leave the edge.</a:t>
+            </a:r>
+          </a:p>
+          <a:p>
+            <a:pPr>
+              <a:spcAft>
+                <a:spcPts val="900"/>
+              </a:spcAft>
+            </a:pPr>
+            <a:r>
+              <a:rPr sz="1700" b="0">
+                <a:solidFill>
+                  <a:srgbClr val="232A26"/>
+                </a:solidFill>
+                <a:latin typeface="Verdana"/>
+              </a:rPr>
+              <a:t>The cloud side is serverless by construction: the same code runs against the local AWS emulator and real AWS, one scripted deployment step apart.</a:t>
+            </a:r>
+          </a:p>
+          <a:p>
+            <a:pPr>
+              <a:spcAft>
+                <a:spcPts val="900"/>
+              </a:spcAft>
+            </a:pPr>
+            <a:r>
+              <a:rPr sz="1700" b="0">
+                <a:solidFill>
+                  <a:srgbClr val="232A26"/>
+                </a:solidFill>
+                <a:latin typeface="Verdana"/>
+              </a:rPr>
+              <a:t>Correctness is proven, not assumed: 61 automated tests, an end-to-end pipeline check, a 2,000-message burst, and a fence for the bug that never showed itself.</a:t>
+            </a:r>
+          </a:p>
+          <a:p>
+            <a:pPr>
+              <a:spcAft>
+                <a:spcPts val="900"/>
+              </a:spcAft>
+            </a:pPr>
+            <a:r>
+              <a:rPr sz="1700" b="1">
+                <a:solidFill>
+                  <a:srgbClr val="C08A1F"/>
+                </a:solidFill>
+                <a:latin typeface="Verdana"/>
+              </a:rPr>
+              <a:t>Thank you. Questions?</a:t>
+            </a:r>
+          </a:p>
+        </p:txBody>
+      </p:sp>
+      <p:sp>
+        <p:nvSpPr>
           <p:cNvPr id="4" name="Rectangle 3"/>
           <p:cNvSpPr/>
           <p:nvPr/>
         </p:nvSpPr>
         <p:spPr>
           <a:xfrm>
-            <a:off x="0" y="0"/>
-            <a:ext cx="12191695" cy="1051560"/>
+            <a:off x="640080" y="457200"/>
+            <a:ext cx="868680" cy="868680"/>
           </a:xfrm>
           <a:prstGeom prst="rect">
             <a:avLst/>
@@ -4338,120 +4598,35 @@
       </p:sp>
       <p:sp>
         <p:nvSpPr>
-          <p:cNvPr id="2" name="Title 1"/>
-          <p:cNvSpPr>
-            <a:spLocks noGrp="1"/>
-          </p:cNvSpPr>
-          <p:nvPr>
-            <p:ph type="title"/>
-          </p:nvPr>
+          <p:cNvPr id="5" name="TextBox 4"/>
+          <p:cNvSpPr txBox="1"/>
+          <p:nvPr/>
         </p:nvSpPr>
         <p:spPr>
           <a:xfrm>
-            <a:off x="640080" y="0"/>
-            <a:ext cx="10972800" cy="1051560"/>
+            <a:off x="640080" y="457200"/>
+            <a:ext cx="868680" cy="868680"/>
           </a:xfrm>
+          <a:prstGeom prst="rect">
+            <a:avLst/>
+          </a:prstGeom>
+          <a:noFill/>
         </p:spPr>
         <p:txBody>
-          <a:bodyPr wrap="square" anchor="ctr"/>
-          <a:lstStyle/>
-          <a:p>
-            <a:pPr algn="l"/>
-            <a:r>
-              <a:rPr b="1" sz="2400">
+          <a:bodyPr wrap="square" anchor="ctr">
+            <a:spAutoFit/>
+          </a:bodyPr>
+          <a:lstStyle/>
+          <a:p>
+            <a:pPr algn="ctr"/>
+            <a:r>
+              <a:rPr sz="2600" b="1" i="0">
                 <a:solidFill>
                   <a:srgbClr val="FFFFFF"/>
                 </a:solidFill>
                 <a:latin typeface="Century Gothic"/>
               </a:rPr>
-              <a:t>Three things to take away</a:t>
-            </a:r>
-          </a:p>
-        </p:txBody>
-      </p:sp>
-      <p:sp>
-        <p:nvSpPr>
-          <p:cNvPr id="3" name="Content Placeholder 2"/>
-          <p:cNvSpPr>
-            <a:spLocks noGrp="1"/>
-          </p:cNvSpPr>
-          <p:nvPr>
-            <p:ph idx="1"/>
-          </p:nvPr>
-        </p:nvSpPr>
-        <p:spPr>
-          <a:xfrm>
-            <a:off x="658368" y="1371600"/>
-            <a:ext cx="10972800" cy="5029200"/>
-          </a:xfrm>
-        </p:spPr>
-        <p:txBody>
-          <a:bodyPr wrap="square">
-            <a:normAutofit/>
-          </a:bodyPr>
-          <a:lstStyle/>
-          <a:p>
-            <a:pPr>
-              <a:spcAft>
-                <a:spcPts val="900"/>
-              </a:spcAft>
-            </a:pPr>
-            <a:r>
-              <a:rPr sz="1700" b="0">
-                <a:solidFill>
-                  <a:srgbClr val="232A26"/>
-                </a:solidFill>
-                <a:latin typeface="Verdana"/>
-              </a:rPr>
-              <a:t>Alerts are computed beside the sensors: ten seconds from street reading to raised incident, and only compact summaries ever leave the edge.</a:t>
-            </a:r>
-          </a:p>
-          <a:p>
-            <a:pPr>
-              <a:spcAft>
-                <a:spcPts val="900"/>
-              </a:spcAft>
-            </a:pPr>
-            <a:r>
-              <a:rPr sz="1700" b="0">
-                <a:solidFill>
-                  <a:srgbClr val="232A26"/>
-                </a:solidFill>
-                <a:latin typeface="Verdana"/>
-              </a:rPr>
-              <a:t>The cloud side is serverless by construction: the same code runs against the local AWS emulator and real AWS, one scripted deployment step apart.</a:t>
-            </a:r>
-          </a:p>
-          <a:p>
-            <a:pPr>
-              <a:spcAft>
-                <a:spcPts val="900"/>
-              </a:spcAft>
-            </a:pPr>
-            <a:r>
-              <a:rPr sz="1700" b="0">
-                <a:solidFill>
-                  <a:srgbClr val="232A26"/>
-                </a:solidFill>
-                <a:latin typeface="Verdana"/>
-              </a:rPr>
-              <a:t>Correctness is proven, not assumed: 61 automated tests, an end-to-end pipeline check, a 2,000-message burst, and a fence for the bug that never showed itself.</a:t>
-            </a:r>
-          </a:p>
-          <a:p>
-            <a:pPr>
-              <a:spcAft>
-                <a:spcPts val="900"/>
-              </a:spcAft>
-            </a:pPr>
-            <a:r>
-              <a:rPr sz="1700" b="1">
-                <a:solidFill>
-                  <a:srgbClr val="C08A1F"/>
-                </a:solidFill>
-                <a:latin typeface="Verdana"/>
-              </a:rPr>
-              <a:t>Thank you. Questions?</a:t>
+              <a:t>5</a:t>
             </a:r>
           </a:p>
         </p:txBody>
